--- a/slides/earthquake_presentation.pptx
+++ b/slides/earthquake_presentation.pptx
@@ -3264,7 +3264,7 @@
                 <a:cs typeface="Leelawadee"/>
                 <a:sym typeface="Leelawadee"/>
               </a:rPr>
-              <a:t>ปุณณวิชญ์ คล้ายรักษ  6710504115  </a:t>
+              <a:t>ปุณณวิชญ์ คล้ายรักษ์  6710504115  </a:t>
             </a:r>
           </a:p>
           <a:p>
